--- a/docs/04_presentation/開発演習報告.pptx
+++ b/docs/04_presentation/開発演習報告.pptx
@@ -5,7 +5,7 @@
     <p:sldMasterId id="2147483648" r:id="rId1"/>
   </p:sldMasterIdLst>
   <p:notesMasterIdLst>
-    <p:notesMasterId r:id="rId13"/>
+    <p:notesMasterId r:id="rId15"/>
   </p:notesMasterIdLst>
   <p:sldIdLst>
     <p:sldId id="256" r:id="rId2"/>
@@ -14,11 +14,13 @@
     <p:sldId id="259" r:id="rId5"/>
     <p:sldId id="260" r:id="rId6"/>
     <p:sldId id="261" r:id="rId7"/>
-    <p:sldId id="263" r:id="rId8"/>
-    <p:sldId id="264" r:id="rId9"/>
-    <p:sldId id="270" r:id="rId10"/>
-    <p:sldId id="268" r:id="rId11"/>
-    <p:sldId id="269" r:id="rId12"/>
+    <p:sldId id="271" r:id="rId8"/>
+    <p:sldId id="263" r:id="rId9"/>
+    <p:sldId id="272" r:id="rId10"/>
+    <p:sldId id="264" r:id="rId11"/>
+    <p:sldId id="270" r:id="rId12"/>
+    <p:sldId id="268" r:id="rId13"/>
+    <p:sldId id="269" r:id="rId14"/>
   </p:sldIdLst>
   <p:sldSz cx="12192000" cy="6858000"/>
   <p:notesSz cx="6858000" cy="9144000"/>
@@ -4182,6 +4184,390 @@
         <p:cNvPr id="1" name="">
           <a:extLst>
             <a:ext uri="{FF2B5EF4-FFF2-40B4-BE49-F238E27FC236}">
+              <a16:creationId xmlns:a16="http://schemas.microsoft.com/office/drawing/2014/main" id="{042417ED-FE9C-B424-2926-BAC7087F274B}"/>
+            </a:ext>
+          </a:extLst>
+        </p:cNvPr>
+        <p:cNvGrpSpPr/>
+        <p:nvPr/>
+      </p:nvGrpSpPr>
+      <p:grpSpPr>
+        <a:xfrm>
+          <a:off x="0" y="0"/>
+          <a:ext cx="0" cy="0"/>
+          <a:chOff x="0" y="0"/>
+          <a:chExt cx="0" cy="0"/>
+        </a:xfrm>
+      </p:grpSpPr>
+      <p:sp>
+        <p:nvSpPr>
+          <p:cNvPr id="2" name="タイトル 1">
+            <a:extLst>
+              <a:ext uri="{FF2B5EF4-FFF2-40B4-BE49-F238E27FC236}">
+                <a16:creationId xmlns:a16="http://schemas.microsoft.com/office/drawing/2014/main" id="{5C622461-B0AF-71E1-050E-CF481FE9667B}"/>
+              </a:ext>
+            </a:extLst>
+          </p:cNvPr>
+          <p:cNvSpPr>
+            <a:spLocks noGrp="1"/>
+          </p:cNvSpPr>
+          <p:nvPr>
+            <p:ph type="title"/>
+          </p:nvPr>
+        </p:nvSpPr>
+        <p:spPr/>
+        <p:txBody>
+          <a:bodyPr/>
+          <a:lstStyle/>
+          <a:p>
+            <a:r>
+              <a:rPr kumimoji="1" lang="ja-JP" altLang="en-US" dirty="0">
+                <a:latin typeface="ＭＳ ゴシック" panose="020B0609070205080204" pitchFamily="49" charset="-128"/>
+                <a:ea typeface="ＭＳ ゴシック" panose="020B0609070205080204" pitchFamily="49" charset="-128"/>
+              </a:rPr>
+              <a:t>一覧機能</a:t>
+            </a:r>
+          </a:p>
+        </p:txBody>
+      </p:sp>
+      <p:pic>
+        <p:nvPicPr>
+          <p:cNvPr id="12" name="図 11">
+            <a:extLst>
+              <a:ext uri="{FF2B5EF4-FFF2-40B4-BE49-F238E27FC236}">
+                <a16:creationId xmlns:a16="http://schemas.microsoft.com/office/drawing/2014/main" id="{B30C12EA-4D7D-02CB-D460-629AC3BB556B}"/>
+              </a:ext>
+            </a:extLst>
+          </p:cNvPr>
+          <p:cNvPicPr>
+            <a:picLocks noChangeAspect="1"/>
+          </p:cNvPicPr>
+          <p:nvPr/>
+        </p:nvPicPr>
+        <p:blipFill>
+          <a:blip r:embed="rId2">
+            <a:extLst>
+              <a:ext uri="{28A0092B-C50C-407E-A947-70E740481C1C}">
+                <a14:useLocalDpi xmlns:a14="http://schemas.microsoft.com/office/drawing/2010/main" val="0"/>
+              </a:ext>
+            </a:extLst>
+          </a:blip>
+          <a:srcRect l="12541" t="4839" r="14577" b="32553"/>
+          <a:stretch>
+            <a:fillRect/>
+          </a:stretch>
+        </p:blipFill>
+        <p:spPr>
+          <a:xfrm>
+            <a:off x="1360170" y="1535438"/>
+            <a:ext cx="5638800" cy="2489584"/>
+          </a:xfrm>
+          <a:prstGeom prst="rect">
+            <a:avLst/>
+          </a:prstGeom>
+        </p:spPr>
+      </p:pic>
+      <p:pic>
+        <p:nvPicPr>
+          <p:cNvPr id="14" name="図 13">
+            <a:extLst>
+              <a:ext uri="{FF2B5EF4-FFF2-40B4-BE49-F238E27FC236}">
+                <a16:creationId xmlns:a16="http://schemas.microsoft.com/office/drawing/2014/main" id="{6AEEF2F1-B85B-9888-D727-BC75960C5084}"/>
+              </a:ext>
+            </a:extLst>
+          </p:cNvPr>
+          <p:cNvPicPr>
+            <a:picLocks noChangeAspect="1"/>
+          </p:cNvPicPr>
+          <p:nvPr/>
+        </p:nvPicPr>
+        <p:blipFill>
+          <a:blip r:embed="rId3">
+            <a:extLst>
+              <a:ext uri="{28A0092B-C50C-407E-A947-70E740481C1C}">
+                <a14:useLocalDpi xmlns:a14="http://schemas.microsoft.com/office/drawing/2010/main" val="0"/>
+              </a:ext>
+            </a:extLst>
+          </a:blip>
+          <a:srcRect l="13313" t="7149" r="11874" b="46536"/>
+          <a:stretch>
+            <a:fillRect/>
+          </a:stretch>
+        </p:blipFill>
+        <p:spPr>
+          <a:xfrm>
+            <a:off x="1360170" y="4025022"/>
+            <a:ext cx="8138160" cy="2590342"/>
+          </a:xfrm>
+          <a:prstGeom prst="rect">
+            <a:avLst/>
+          </a:prstGeom>
+        </p:spPr>
+      </p:pic>
+    </p:spTree>
+    <p:extLst>
+      <p:ext uri="{BB962C8B-B14F-4D97-AF65-F5344CB8AC3E}">
+        <p14:creationId xmlns:p14="http://schemas.microsoft.com/office/powerpoint/2010/main" val="3019634273"/>
+      </p:ext>
+    </p:extLst>
+  </p:cSld>
+  <p:clrMapOvr>
+    <a:masterClrMapping/>
+  </p:clrMapOvr>
+</p:sld>
+</file>
+
+<file path=ppt/slides/slide11.xml><?xml version="1.0" encoding="utf-8"?>
+<p:sld xmlns:a="http://schemas.openxmlformats.org/drawingml/2006/main" xmlns:r="http://schemas.openxmlformats.org/officeDocument/2006/relationships" xmlns:p="http://schemas.openxmlformats.org/presentationml/2006/main">
+  <p:cSld>
+    <p:spTree>
+      <p:nvGrpSpPr>
+        <p:cNvPr id="1" name=""/>
+        <p:cNvGrpSpPr/>
+        <p:nvPr/>
+      </p:nvGrpSpPr>
+      <p:grpSpPr>
+        <a:xfrm>
+          <a:off x="0" y="0"/>
+          <a:ext cx="0" cy="0"/>
+          <a:chOff x="0" y="0"/>
+          <a:chExt cx="0" cy="0"/>
+        </a:xfrm>
+      </p:grpSpPr>
+      <p:sp>
+        <p:nvSpPr>
+          <p:cNvPr id="2" name="タイトル 1">
+            <a:extLst>
+              <a:ext uri="{FF2B5EF4-FFF2-40B4-BE49-F238E27FC236}">
+                <a16:creationId xmlns:a16="http://schemas.microsoft.com/office/drawing/2014/main" id="{BE3A7B5F-8ADD-E072-A7B3-8A5F272FC6D8}"/>
+              </a:ext>
+            </a:extLst>
+          </p:cNvPr>
+          <p:cNvSpPr>
+            <a:spLocks noGrp="1"/>
+          </p:cNvSpPr>
+          <p:nvPr>
+            <p:ph type="title"/>
+          </p:nvPr>
+        </p:nvSpPr>
+        <p:spPr/>
+        <p:txBody>
+          <a:bodyPr/>
+          <a:lstStyle/>
+          <a:p>
+            <a:r>
+              <a:rPr kumimoji="1" lang="ja-JP" altLang="en-US" dirty="0">
+                <a:latin typeface="ＭＳ ゴシック" panose="020B0609070205080204" pitchFamily="49" charset="-128"/>
+                <a:ea typeface="ＭＳ ゴシック" panose="020B0609070205080204" pitchFamily="49" charset="-128"/>
+              </a:rPr>
+              <a:t>成果の報告</a:t>
+            </a:r>
+          </a:p>
+        </p:txBody>
+      </p:sp>
+      <p:sp>
+        <p:nvSpPr>
+          <p:cNvPr id="3" name="コンテンツ プレースホルダー 2">
+            <a:extLst>
+              <a:ext uri="{FF2B5EF4-FFF2-40B4-BE49-F238E27FC236}">
+                <a16:creationId xmlns:a16="http://schemas.microsoft.com/office/drawing/2014/main" id="{2724422C-F36B-F00A-F869-15D73C6F70C8}"/>
+              </a:ext>
+            </a:extLst>
+          </p:cNvPr>
+          <p:cNvSpPr>
+            <a:spLocks noGrp="1"/>
+          </p:cNvSpPr>
+          <p:nvPr>
+            <p:ph idx="1"/>
+          </p:nvPr>
+        </p:nvSpPr>
+        <p:spPr/>
+        <p:txBody>
+          <a:bodyPr>
+            <a:normAutofit/>
+          </a:bodyPr>
+          <a:lstStyle/>
+          <a:p>
+            <a:pPr>
+              <a:buFont typeface="Wingdings" panose="05000000000000000000" pitchFamily="2" charset="2"/>
+              <a:buChar char="n"/>
+            </a:pPr>
+            <a:r>
+              <a:rPr kumimoji="1" lang="ja-JP" altLang="en-US" sz="3200" dirty="0">
+                <a:latin typeface="ＭＳ ゴシック" panose="020B0609070205080204" pitchFamily="49" charset="-128"/>
+                <a:ea typeface="ＭＳ ゴシック" panose="020B0609070205080204" pitchFamily="49" charset="-128"/>
+              </a:rPr>
+              <a:t>困難を感じたこと</a:t>
+            </a:r>
+            <a:endParaRPr kumimoji="1" lang="en-US" altLang="ja-JP" sz="3200" dirty="0">
+              <a:latin typeface="ＭＳ ゴシック" panose="020B0609070205080204" pitchFamily="49" charset="-128"/>
+              <a:ea typeface="ＭＳ ゴシック" panose="020B0609070205080204" pitchFamily="49" charset="-128"/>
+            </a:endParaRPr>
+          </a:p>
+          <a:p>
+            <a:pPr indent="34925"/>
+            <a:r>
+              <a:rPr lang="ja-JP" altLang="en-US" dirty="0">
+                <a:latin typeface="ＭＳ ゴシック" panose="020B0609070205080204" pitchFamily="49" charset="-128"/>
+                <a:ea typeface="ＭＳ ゴシック" panose="020B0609070205080204" pitchFamily="49" charset="-128"/>
+              </a:rPr>
+              <a:t>クラス間のつながり、概念の理解</a:t>
+            </a:r>
+            <a:endParaRPr kumimoji="1" lang="en-US" altLang="ja-JP" dirty="0">
+              <a:latin typeface="ＭＳ ゴシック" panose="020B0609070205080204" pitchFamily="49" charset="-128"/>
+              <a:ea typeface="ＭＳ ゴシック" panose="020B0609070205080204" pitchFamily="49" charset="-128"/>
+            </a:endParaRPr>
+          </a:p>
+          <a:p>
+            <a:pPr marL="811212" indent="-457200"/>
+            <a:endParaRPr kumimoji="1" lang="ja-JP" altLang="en-US" sz="3200" dirty="0">
+              <a:latin typeface="ＭＳ ゴシック" panose="020B0609070205080204" pitchFamily="49" charset="-128"/>
+              <a:ea typeface="ＭＳ ゴシック" panose="020B0609070205080204" pitchFamily="49" charset="-128"/>
+            </a:endParaRPr>
+          </a:p>
+        </p:txBody>
+      </p:sp>
+      <p:pic>
+        <p:nvPicPr>
+          <p:cNvPr id="5" name="図 4">
+            <a:extLst>
+              <a:ext uri="{FF2B5EF4-FFF2-40B4-BE49-F238E27FC236}">
+                <a16:creationId xmlns:a16="http://schemas.microsoft.com/office/drawing/2014/main" id="{38759D24-F9EB-6398-B339-62D952F9F53F}"/>
+              </a:ext>
+            </a:extLst>
+          </p:cNvPr>
+          <p:cNvPicPr>
+            <a:picLocks noChangeAspect="1"/>
+          </p:cNvPicPr>
+          <p:nvPr/>
+        </p:nvPicPr>
+        <p:blipFill>
+          <a:blip r:embed="rId2">
+            <a:extLst>
+              <a:ext uri="{28A0092B-C50C-407E-A947-70E740481C1C}">
+                <a14:useLocalDpi xmlns:a14="http://schemas.microsoft.com/office/drawing/2010/main" val="0"/>
+              </a:ext>
+            </a:extLst>
+          </a:blip>
+          <a:stretch>
+            <a:fillRect/>
+          </a:stretch>
+        </p:blipFill>
+        <p:spPr>
+          <a:xfrm>
+            <a:off x="6992459" y="1874520"/>
+            <a:ext cx="4771017" cy="3500755"/>
+          </a:xfrm>
+          <a:prstGeom prst="rect">
+            <a:avLst/>
+          </a:prstGeom>
+        </p:spPr>
+      </p:pic>
+      <p:sp>
+        <p:nvSpPr>
+          <p:cNvPr id="6" name="矢印: 下 5">
+            <a:extLst>
+              <a:ext uri="{FF2B5EF4-FFF2-40B4-BE49-F238E27FC236}">
+                <a16:creationId xmlns:a16="http://schemas.microsoft.com/office/drawing/2014/main" id="{EFA3C5C3-EB83-59C3-4878-6DA4D2287D49}"/>
+              </a:ext>
+            </a:extLst>
+          </p:cNvPr>
+          <p:cNvSpPr/>
+          <p:nvPr/>
+        </p:nvSpPr>
+        <p:spPr>
+          <a:xfrm>
+            <a:off x="3380422" y="3190558"/>
+            <a:ext cx="971550" cy="868680"/>
+          </a:xfrm>
+          <a:prstGeom prst="downArrow">
+            <a:avLst/>
+          </a:prstGeom>
+        </p:spPr>
+        <p:style>
+          <a:lnRef idx="2">
+            <a:schemeClr val="accent1">
+              <a:shade val="15000"/>
+            </a:schemeClr>
+          </a:lnRef>
+          <a:fillRef idx="1">
+            <a:schemeClr val="accent1"/>
+          </a:fillRef>
+          <a:effectRef idx="0">
+            <a:schemeClr val="accent1"/>
+          </a:effectRef>
+          <a:fontRef idx="minor">
+            <a:schemeClr val="lt1"/>
+          </a:fontRef>
+        </p:style>
+        <p:txBody>
+          <a:bodyPr rtlCol="0" anchor="ctr"/>
+          <a:lstStyle/>
+          <a:p>
+            <a:pPr algn="ctr"/>
+            <a:endParaRPr kumimoji="1" lang="ja-JP" altLang="en-US"/>
+          </a:p>
+        </p:txBody>
+      </p:sp>
+      <p:sp>
+        <p:nvSpPr>
+          <p:cNvPr id="8" name="テキスト ボックス 7">
+            <a:extLst>
+              <a:ext uri="{FF2B5EF4-FFF2-40B4-BE49-F238E27FC236}">
+                <a16:creationId xmlns:a16="http://schemas.microsoft.com/office/drawing/2014/main" id="{F81E8CBF-73B4-CEB1-680F-3A1AF5A78EEB}"/>
+              </a:ext>
+            </a:extLst>
+          </p:cNvPr>
+          <p:cNvSpPr txBox="1"/>
+          <p:nvPr/>
+        </p:nvSpPr>
+        <p:spPr>
+          <a:xfrm>
+            <a:off x="992505" y="4513168"/>
+            <a:ext cx="5747385" cy="1384995"/>
+          </a:xfrm>
+          <a:prstGeom prst="rect">
+            <a:avLst/>
+          </a:prstGeom>
+          <a:noFill/>
+        </p:spPr>
+        <p:txBody>
+          <a:bodyPr wrap="square" rtlCol="0">
+            <a:spAutoFit/>
+          </a:bodyPr>
+          <a:lstStyle/>
+          <a:p>
+            <a:r>
+              <a:rPr kumimoji="1" lang="ja-JP" altLang="en-US" sz="2800" dirty="0">
+                <a:latin typeface="ＭＳ ゴシック" panose="020B0609070205080204" pitchFamily="49" charset="-128"/>
+                <a:ea typeface="ＭＳ ゴシック" panose="020B0609070205080204" pitchFamily="49" charset="-128"/>
+              </a:rPr>
+              <a:t>開発演習で実際の開発を通じてそれぞれのクラスの役割、つながりを理解できた。</a:t>
+            </a:r>
+          </a:p>
+        </p:txBody>
+      </p:sp>
+    </p:spTree>
+    <p:extLst>
+      <p:ext uri="{BB962C8B-B14F-4D97-AF65-F5344CB8AC3E}">
+        <p14:creationId xmlns:p14="http://schemas.microsoft.com/office/powerpoint/2010/main" val="1528263843"/>
+      </p:ext>
+    </p:extLst>
+  </p:cSld>
+  <p:clrMapOvr>
+    <a:masterClrMapping/>
+  </p:clrMapOvr>
+</p:sld>
+</file>
+
+<file path=ppt/slides/slide12.xml><?xml version="1.0" encoding="utf-8"?>
+<p:sld xmlns:a="http://schemas.openxmlformats.org/drawingml/2006/main" xmlns:r="http://schemas.openxmlformats.org/officeDocument/2006/relationships" xmlns:p="http://schemas.openxmlformats.org/presentationml/2006/main">
+  <p:cSld>
+    <p:spTree>
+      <p:nvGrpSpPr>
+        <p:cNvPr id="1" name="">
+          <a:extLst>
+            <a:ext uri="{FF2B5EF4-FFF2-40B4-BE49-F238E27FC236}">
               <a16:creationId xmlns:a16="http://schemas.microsoft.com/office/drawing/2014/main" id="{E3D5EA54-77A1-C349-E9EE-74E944E2DF23}"/>
             </a:ext>
           </a:extLst>
@@ -4612,7 +4998,7 @@
 </p:sld>
 </file>
 
-<file path=ppt/slides/slide11.xml><?xml version="1.0" encoding="utf-8"?>
+<file path=ppt/slides/slide13.xml><?xml version="1.0" encoding="utf-8"?>
 <p:sld xmlns:a="http://schemas.openxmlformats.org/drawingml/2006/main" xmlns:r="http://schemas.openxmlformats.org/officeDocument/2006/relationships" xmlns:p="http://schemas.openxmlformats.org/presentationml/2006/main">
   <p:cSld>
     <p:spTree>
@@ -5885,6 +6271,109 @@
         <p:cNvPr id="1" name="">
           <a:extLst>
             <a:ext uri="{FF2B5EF4-FFF2-40B4-BE49-F238E27FC236}">
+              <a16:creationId xmlns:a16="http://schemas.microsoft.com/office/drawing/2014/main" id="{A4B7A2F2-BA03-CFC3-0E93-C9B33E3DDE0F}"/>
+            </a:ext>
+          </a:extLst>
+        </p:cNvPr>
+        <p:cNvGrpSpPr/>
+        <p:nvPr/>
+      </p:nvGrpSpPr>
+      <p:grpSpPr>
+        <a:xfrm>
+          <a:off x="0" y="0"/>
+          <a:ext cx="0" cy="0"/>
+          <a:chOff x="0" y="0"/>
+          <a:chExt cx="0" cy="0"/>
+        </a:xfrm>
+      </p:grpSpPr>
+      <p:sp>
+        <p:nvSpPr>
+          <p:cNvPr id="2" name="タイトル 1">
+            <a:extLst>
+              <a:ext uri="{FF2B5EF4-FFF2-40B4-BE49-F238E27FC236}">
+                <a16:creationId xmlns:a16="http://schemas.microsoft.com/office/drawing/2014/main" id="{EE9507A9-E4DF-9A2E-93B9-AC77E282FF42}"/>
+              </a:ext>
+            </a:extLst>
+          </p:cNvPr>
+          <p:cNvSpPr>
+            <a:spLocks noGrp="1"/>
+          </p:cNvSpPr>
+          <p:nvPr>
+            <p:ph type="title"/>
+          </p:nvPr>
+        </p:nvSpPr>
+        <p:spPr/>
+        <p:txBody>
+          <a:bodyPr/>
+          <a:lstStyle/>
+          <a:p>
+            <a:r>
+              <a:rPr kumimoji="1" lang="ja-JP" altLang="en-US" dirty="0">
+                <a:latin typeface="ＭＳ ゴシック" panose="020B0609070205080204" pitchFamily="49" charset="-128"/>
+                <a:ea typeface="ＭＳ ゴシック" panose="020B0609070205080204" pitchFamily="49" charset="-128"/>
+              </a:rPr>
+              <a:t>従業員登録機能</a:t>
+            </a:r>
+          </a:p>
+        </p:txBody>
+      </p:sp>
+      <p:pic>
+        <p:nvPicPr>
+          <p:cNvPr id="8" name="図 7">
+            <a:extLst>
+              <a:ext uri="{FF2B5EF4-FFF2-40B4-BE49-F238E27FC236}">
+                <a16:creationId xmlns:a16="http://schemas.microsoft.com/office/drawing/2014/main" id="{8D8ECFC3-8904-49DC-F83A-D466A3422122}"/>
+              </a:ext>
+            </a:extLst>
+          </p:cNvPr>
+          <p:cNvPicPr>
+            <a:picLocks noChangeAspect="1"/>
+          </p:cNvPicPr>
+          <p:nvPr/>
+        </p:nvPicPr>
+        <p:blipFill>
+          <a:blip r:embed="rId2">
+            <a:extLst>
+              <a:ext uri="{28A0092B-C50C-407E-A947-70E740481C1C}">
+                <a14:useLocalDpi xmlns:a14="http://schemas.microsoft.com/office/drawing/2010/main" val="0"/>
+              </a:ext>
+            </a:extLst>
+          </a:blip>
+          <a:stretch>
+            <a:fillRect/>
+          </a:stretch>
+        </p:blipFill>
+        <p:spPr>
+          <a:xfrm>
+            <a:off x="1552575" y="1690688"/>
+            <a:ext cx="9086850" cy="4486514"/>
+          </a:xfrm>
+          <a:prstGeom prst="rect">
+            <a:avLst/>
+          </a:prstGeom>
+        </p:spPr>
+      </p:pic>
+    </p:spTree>
+    <p:extLst>
+      <p:ext uri="{BB962C8B-B14F-4D97-AF65-F5344CB8AC3E}">
+        <p14:creationId xmlns:p14="http://schemas.microsoft.com/office/powerpoint/2010/main" val="1002714824"/>
+      </p:ext>
+    </p:extLst>
+  </p:cSld>
+  <p:clrMapOvr>
+    <a:masterClrMapping/>
+  </p:clrMapOvr>
+</p:sld>
+</file>
+
+<file path=ppt/slides/slide8.xml><?xml version="1.0" encoding="utf-8"?>
+<p:sld xmlns:a="http://schemas.openxmlformats.org/drawingml/2006/main" xmlns:r="http://schemas.openxmlformats.org/officeDocument/2006/relationships" xmlns:p="http://schemas.openxmlformats.org/presentationml/2006/main">
+  <p:cSld>
+    <p:spTree>
+      <p:nvGrpSpPr>
+        <p:cNvPr id="1" name="">
+          <a:extLst>
+            <a:ext uri="{FF2B5EF4-FFF2-40B4-BE49-F238E27FC236}">
               <a16:creationId xmlns:a16="http://schemas.microsoft.com/office/drawing/2014/main" id="{92777CDB-A42A-C9D9-2C68-C8492A565187}"/>
             </a:ext>
           </a:extLst>
@@ -6062,147 +6551,6 @@
 </p:sld>
 </file>
 
-<file path=ppt/slides/slide8.xml><?xml version="1.0" encoding="utf-8"?>
-<p:sld xmlns:a="http://schemas.openxmlformats.org/drawingml/2006/main" xmlns:r="http://schemas.openxmlformats.org/officeDocument/2006/relationships" xmlns:p="http://schemas.openxmlformats.org/presentationml/2006/main">
-  <p:cSld>
-    <p:spTree>
-      <p:nvGrpSpPr>
-        <p:cNvPr id="1" name="">
-          <a:extLst>
-            <a:ext uri="{FF2B5EF4-FFF2-40B4-BE49-F238E27FC236}">
-              <a16:creationId xmlns:a16="http://schemas.microsoft.com/office/drawing/2014/main" id="{042417ED-FE9C-B424-2926-BAC7087F274B}"/>
-            </a:ext>
-          </a:extLst>
-        </p:cNvPr>
-        <p:cNvGrpSpPr/>
-        <p:nvPr/>
-      </p:nvGrpSpPr>
-      <p:grpSpPr>
-        <a:xfrm>
-          <a:off x="0" y="0"/>
-          <a:ext cx="0" cy="0"/>
-          <a:chOff x="0" y="0"/>
-          <a:chExt cx="0" cy="0"/>
-        </a:xfrm>
-      </p:grpSpPr>
-      <p:sp>
-        <p:nvSpPr>
-          <p:cNvPr id="2" name="タイトル 1">
-            <a:extLst>
-              <a:ext uri="{FF2B5EF4-FFF2-40B4-BE49-F238E27FC236}">
-                <a16:creationId xmlns:a16="http://schemas.microsoft.com/office/drawing/2014/main" id="{5C622461-B0AF-71E1-050E-CF481FE9667B}"/>
-              </a:ext>
-            </a:extLst>
-          </p:cNvPr>
-          <p:cNvSpPr>
-            <a:spLocks noGrp="1"/>
-          </p:cNvSpPr>
-          <p:nvPr>
-            <p:ph type="title"/>
-          </p:nvPr>
-        </p:nvSpPr>
-        <p:spPr/>
-        <p:txBody>
-          <a:bodyPr/>
-          <a:lstStyle/>
-          <a:p>
-            <a:r>
-              <a:rPr kumimoji="1" lang="ja-JP" altLang="en-US" dirty="0">
-                <a:latin typeface="ＭＳ ゴシック" panose="020B0609070205080204" pitchFamily="49" charset="-128"/>
-                <a:ea typeface="ＭＳ ゴシック" panose="020B0609070205080204" pitchFamily="49" charset="-128"/>
-              </a:rPr>
-              <a:t>一覧機能</a:t>
-            </a:r>
-          </a:p>
-        </p:txBody>
-      </p:sp>
-      <p:pic>
-        <p:nvPicPr>
-          <p:cNvPr id="12" name="図 11">
-            <a:extLst>
-              <a:ext uri="{FF2B5EF4-FFF2-40B4-BE49-F238E27FC236}">
-                <a16:creationId xmlns:a16="http://schemas.microsoft.com/office/drawing/2014/main" id="{B30C12EA-4D7D-02CB-D460-629AC3BB556B}"/>
-              </a:ext>
-            </a:extLst>
-          </p:cNvPr>
-          <p:cNvPicPr>
-            <a:picLocks noChangeAspect="1"/>
-          </p:cNvPicPr>
-          <p:nvPr/>
-        </p:nvPicPr>
-        <p:blipFill>
-          <a:blip r:embed="rId2">
-            <a:extLst>
-              <a:ext uri="{28A0092B-C50C-407E-A947-70E740481C1C}">
-                <a14:useLocalDpi xmlns:a14="http://schemas.microsoft.com/office/drawing/2010/main" val="0"/>
-              </a:ext>
-            </a:extLst>
-          </a:blip>
-          <a:srcRect l="12541" t="4839" r="14577" b="32553"/>
-          <a:stretch>
-            <a:fillRect/>
-          </a:stretch>
-        </p:blipFill>
-        <p:spPr>
-          <a:xfrm>
-            <a:off x="1360170" y="1535438"/>
-            <a:ext cx="5638800" cy="2489584"/>
-          </a:xfrm>
-          <a:prstGeom prst="rect">
-            <a:avLst/>
-          </a:prstGeom>
-        </p:spPr>
-      </p:pic>
-      <p:pic>
-        <p:nvPicPr>
-          <p:cNvPr id="14" name="図 13">
-            <a:extLst>
-              <a:ext uri="{FF2B5EF4-FFF2-40B4-BE49-F238E27FC236}">
-                <a16:creationId xmlns:a16="http://schemas.microsoft.com/office/drawing/2014/main" id="{6AEEF2F1-B85B-9888-D727-BC75960C5084}"/>
-              </a:ext>
-            </a:extLst>
-          </p:cNvPr>
-          <p:cNvPicPr>
-            <a:picLocks noChangeAspect="1"/>
-          </p:cNvPicPr>
-          <p:nvPr/>
-        </p:nvPicPr>
-        <p:blipFill>
-          <a:blip r:embed="rId3">
-            <a:extLst>
-              <a:ext uri="{28A0092B-C50C-407E-A947-70E740481C1C}">
-                <a14:useLocalDpi xmlns:a14="http://schemas.microsoft.com/office/drawing/2010/main" val="0"/>
-              </a:ext>
-            </a:extLst>
-          </a:blip>
-          <a:srcRect l="13313" t="7149" r="11874" b="46536"/>
-          <a:stretch>
-            <a:fillRect/>
-          </a:stretch>
-        </p:blipFill>
-        <p:spPr>
-          <a:xfrm>
-            <a:off x="1360170" y="4025022"/>
-            <a:ext cx="8138160" cy="2590342"/>
-          </a:xfrm>
-          <a:prstGeom prst="rect">
-            <a:avLst/>
-          </a:prstGeom>
-        </p:spPr>
-      </p:pic>
-    </p:spTree>
-    <p:extLst>
-      <p:ext uri="{BB962C8B-B14F-4D97-AF65-F5344CB8AC3E}">
-        <p14:creationId xmlns:p14="http://schemas.microsoft.com/office/powerpoint/2010/main" val="3019634273"/>
-      </p:ext>
-    </p:extLst>
-  </p:cSld>
-  <p:clrMapOvr>
-    <a:masterClrMapping/>
-  </p:clrMapOvr>
-</p:sld>
-</file>
-
 <file path=ppt/slides/slide9.xml><?xml version="1.0" encoding="utf-8"?>
 <p:sld xmlns:a="http://schemas.openxmlformats.org/drawingml/2006/main" xmlns:r="http://schemas.openxmlformats.org/officeDocument/2006/relationships" xmlns:p="http://schemas.openxmlformats.org/presentationml/2006/main">
   <p:cSld>
@@ -6225,7 +6573,7 @@
           <p:cNvPr id="2" name="タイトル 1">
             <a:extLst>
               <a:ext uri="{FF2B5EF4-FFF2-40B4-BE49-F238E27FC236}">
-                <a16:creationId xmlns:a16="http://schemas.microsoft.com/office/drawing/2014/main" id="{BE3A7B5F-8ADD-E072-A7B3-8A5F272FC6D8}"/>
+                <a16:creationId xmlns:a16="http://schemas.microsoft.com/office/drawing/2014/main" id="{2000AF13-7CC4-508A-F9A9-080903FB2593}"/>
               </a:ext>
             </a:extLst>
           </p:cNvPr>
@@ -6246,79 +6594,17 @@
                 <a:latin typeface="ＭＳ ゴシック" panose="020B0609070205080204" pitchFamily="49" charset="-128"/>
                 <a:ea typeface="ＭＳ ゴシック" panose="020B0609070205080204" pitchFamily="49" charset="-128"/>
               </a:rPr>
-              <a:t>成果の報告</a:t>
-            </a:r>
-          </a:p>
-        </p:txBody>
-      </p:sp>
-      <p:sp>
-        <p:nvSpPr>
-          <p:cNvPr id="3" name="コンテンツ プレースホルダー 2">
-            <a:extLst>
-              <a:ext uri="{FF2B5EF4-FFF2-40B4-BE49-F238E27FC236}">
-                <a16:creationId xmlns:a16="http://schemas.microsoft.com/office/drawing/2014/main" id="{2724422C-F36B-F00A-F869-15D73C6F70C8}"/>
-              </a:ext>
-            </a:extLst>
-          </p:cNvPr>
-          <p:cNvSpPr>
-            <a:spLocks noGrp="1"/>
-          </p:cNvSpPr>
-          <p:nvPr>
-            <p:ph idx="1"/>
-          </p:nvPr>
-        </p:nvSpPr>
-        <p:spPr/>
-        <p:txBody>
-          <a:bodyPr>
-            <a:normAutofit/>
-          </a:bodyPr>
-          <a:lstStyle/>
-          <a:p>
-            <a:pPr>
-              <a:buFont typeface="Wingdings" panose="05000000000000000000" pitchFamily="2" charset="2"/>
-              <a:buChar char="n"/>
-            </a:pPr>
-            <a:r>
-              <a:rPr kumimoji="1" lang="ja-JP" altLang="en-US" sz="3200" dirty="0">
-                <a:latin typeface="ＭＳ ゴシック" panose="020B0609070205080204" pitchFamily="49" charset="-128"/>
-                <a:ea typeface="ＭＳ ゴシック" panose="020B0609070205080204" pitchFamily="49" charset="-128"/>
-              </a:rPr>
-              <a:t>困難を感じたこと</a:t>
-            </a:r>
-            <a:endParaRPr kumimoji="1" lang="en-US" altLang="ja-JP" sz="3200" dirty="0">
-              <a:latin typeface="ＭＳ ゴシック" panose="020B0609070205080204" pitchFamily="49" charset="-128"/>
-              <a:ea typeface="ＭＳ ゴシック" panose="020B0609070205080204" pitchFamily="49" charset="-128"/>
-            </a:endParaRPr>
-          </a:p>
-          <a:p>
-            <a:pPr indent="34925"/>
-            <a:r>
-              <a:rPr lang="ja-JP" altLang="en-US" dirty="0">
-                <a:latin typeface="ＭＳ ゴシック" panose="020B0609070205080204" pitchFamily="49" charset="-128"/>
-                <a:ea typeface="ＭＳ ゴシック" panose="020B0609070205080204" pitchFamily="49" charset="-128"/>
-              </a:rPr>
-              <a:t>クラス間のつながり、概念の理解</a:t>
-            </a:r>
-            <a:endParaRPr kumimoji="1" lang="en-US" altLang="ja-JP" dirty="0">
-              <a:latin typeface="ＭＳ ゴシック" panose="020B0609070205080204" pitchFamily="49" charset="-128"/>
-              <a:ea typeface="ＭＳ ゴシック" panose="020B0609070205080204" pitchFamily="49" charset="-128"/>
-            </a:endParaRPr>
-          </a:p>
-          <a:p>
-            <a:pPr marL="811212" indent="-457200"/>
-            <a:endParaRPr kumimoji="1" lang="ja-JP" altLang="en-US" sz="3200" dirty="0">
-              <a:latin typeface="ＭＳ ゴシック" panose="020B0609070205080204" pitchFamily="49" charset="-128"/>
-              <a:ea typeface="ＭＳ ゴシック" panose="020B0609070205080204" pitchFamily="49" charset="-128"/>
-            </a:endParaRPr>
+              <a:t>部署登録機能</a:t>
+            </a:r>
           </a:p>
         </p:txBody>
       </p:sp>
       <p:pic>
         <p:nvPicPr>
-          <p:cNvPr id="5" name="図 4">
-            <a:extLst>
-              <a:ext uri="{FF2B5EF4-FFF2-40B4-BE49-F238E27FC236}">
-                <a16:creationId xmlns:a16="http://schemas.microsoft.com/office/drawing/2014/main" id="{38759D24-F9EB-6398-B339-62D952F9F53F}"/>
+          <p:cNvPr id="7" name="図 6">
+            <a:extLst>
+              <a:ext uri="{FF2B5EF4-FFF2-40B4-BE49-F238E27FC236}">
+                <a16:creationId xmlns:a16="http://schemas.microsoft.com/office/drawing/2014/main" id="{AE2FFD5D-773E-1AF8-782D-465FDC803DB8}"/>
               </a:ext>
             </a:extLst>
           </p:cNvPr>
@@ -6341,102 +6627,18 @@
         </p:blipFill>
         <p:spPr>
           <a:xfrm>
-            <a:off x="6992459" y="1874520"/>
-            <a:ext cx="4771017" cy="3500755"/>
+            <a:off x="1211580" y="1690688"/>
+            <a:ext cx="8961120" cy="4422006"/>
           </a:xfrm>
           <a:prstGeom prst="rect">
             <a:avLst/>
           </a:prstGeom>
         </p:spPr>
       </p:pic>
-      <p:sp>
-        <p:nvSpPr>
-          <p:cNvPr id="6" name="矢印: 下 5">
-            <a:extLst>
-              <a:ext uri="{FF2B5EF4-FFF2-40B4-BE49-F238E27FC236}">
-                <a16:creationId xmlns:a16="http://schemas.microsoft.com/office/drawing/2014/main" id="{EFA3C5C3-EB83-59C3-4878-6DA4D2287D49}"/>
-              </a:ext>
-            </a:extLst>
-          </p:cNvPr>
-          <p:cNvSpPr/>
-          <p:nvPr/>
-        </p:nvSpPr>
-        <p:spPr>
-          <a:xfrm>
-            <a:off x="3380422" y="3190558"/>
-            <a:ext cx="971550" cy="868680"/>
-          </a:xfrm>
-          <a:prstGeom prst="downArrow">
-            <a:avLst/>
-          </a:prstGeom>
-        </p:spPr>
-        <p:style>
-          <a:lnRef idx="2">
-            <a:schemeClr val="accent1">
-              <a:shade val="15000"/>
-            </a:schemeClr>
-          </a:lnRef>
-          <a:fillRef idx="1">
-            <a:schemeClr val="accent1"/>
-          </a:fillRef>
-          <a:effectRef idx="0">
-            <a:schemeClr val="accent1"/>
-          </a:effectRef>
-          <a:fontRef idx="minor">
-            <a:schemeClr val="lt1"/>
-          </a:fontRef>
-        </p:style>
-        <p:txBody>
-          <a:bodyPr rtlCol="0" anchor="ctr"/>
-          <a:lstStyle/>
-          <a:p>
-            <a:pPr algn="ctr"/>
-            <a:endParaRPr kumimoji="1" lang="ja-JP" altLang="en-US"/>
-          </a:p>
-        </p:txBody>
-      </p:sp>
-      <p:sp>
-        <p:nvSpPr>
-          <p:cNvPr id="8" name="テキスト ボックス 7">
-            <a:extLst>
-              <a:ext uri="{FF2B5EF4-FFF2-40B4-BE49-F238E27FC236}">
-                <a16:creationId xmlns:a16="http://schemas.microsoft.com/office/drawing/2014/main" id="{F81E8CBF-73B4-CEB1-680F-3A1AF5A78EEB}"/>
-              </a:ext>
-            </a:extLst>
-          </p:cNvPr>
-          <p:cNvSpPr txBox="1"/>
-          <p:nvPr/>
-        </p:nvSpPr>
-        <p:spPr>
-          <a:xfrm>
-            <a:off x="992505" y="4513168"/>
-            <a:ext cx="5747385" cy="1384995"/>
-          </a:xfrm>
-          <a:prstGeom prst="rect">
-            <a:avLst/>
-          </a:prstGeom>
-          <a:noFill/>
-        </p:spPr>
-        <p:txBody>
-          <a:bodyPr wrap="square" rtlCol="0">
-            <a:spAutoFit/>
-          </a:bodyPr>
-          <a:lstStyle/>
-          <a:p>
-            <a:r>
-              <a:rPr kumimoji="1" lang="ja-JP" altLang="en-US" sz="2800" dirty="0">
-                <a:latin typeface="ＭＳ ゴシック" panose="020B0609070205080204" pitchFamily="49" charset="-128"/>
-                <a:ea typeface="ＭＳ ゴシック" panose="020B0609070205080204" pitchFamily="49" charset="-128"/>
-              </a:rPr>
-              <a:t>開発演習で実際の開発を通じてそれぞれのクラスの役割、つながりを理解できた。</a:t>
-            </a:r>
-          </a:p>
-        </p:txBody>
-      </p:sp>
     </p:spTree>
     <p:extLst>
       <p:ext uri="{BB962C8B-B14F-4D97-AF65-F5344CB8AC3E}">
-        <p14:creationId xmlns:p14="http://schemas.microsoft.com/office/powerpoint/2010/main" val="1528263843"/>
+        <p14:creationId xmlns:p14="http://schemas.microsoft.com/office/powerpoint/2010/main" val="3262832946"/>
       </p:ext>
     </p:extLst>
   </p:cSld>
